--- a/aulas/aula-08-devsecops.pptx
+++ b/aulas/aula-08-devsecops.pptx
@@ -6,14 +6,14 @@
   </p:sldMasterIdLst>
   <p:sldIdLst>
     <p:sldId id="256" r:id="rId7"/>
-    <p:sldId id="257" r:id="rId8"/>
-    <p:sldId id="258" r:id="rId9"/>
-    <p:sldId id="259" r:id="rId10"/>
-    <p:sldId id="260" r:id="rId11"/>
-    <p:sldId id="261" r:id="rId12"/>
-    <p:sldId id="262" r:id="rId13"/>
-    <p:sldId id="263" r:id="rId14"/>
-    <p:sldId id="264" r:id="rId15"/>
+    <p:sldId id="257" r:id="rId9"/>
+    <p:sldId id="258" r:id="rId10"/>
+    <p:sldId id="259" r:id="rId11"/>
+    <p:sldId id="260" r:id="rId12"/>
+    <p:sldId id="261" r:id="rId13"/>
+    <p:sldId id="262" r:id="rId14"/>
+    <p:sldId id="263" r:id="rId15"/>
+    <p:sldId id="264" r:id="rId16"/>
   </p:sldIdLst>
   <p:sldSz cx="12191695" cy="6858000" type="screen4x3"/>
   <p:notesSz cx="6858000" cy="9144000"/>
@@ -113,6 +113,706 @@
     </a:lvl9pPr>
   </p:defaultTextStyle>
 </p:presentation>
+</file>
+
+<file path=ppt/notesMasters/notesMaster1.xml><?xml version="1.0" encoding="utf-8"?>
+<p:notesMaster xmlns:a="http://schemas.openxmlformats.org/drawingml/2006/main" xmlns:p="http://schemas.openxmlformats.org/presentationml/2006/main" xmlns:r="http://schemas.openxmlformats.org/officeDocument/2006/relationships">
+  <p:cSld>
+    <p:bg>
+      <p:bgRef idx="1001">
+        <a:schemeClr val="bg1"/>
+      </p:bgRef>
+    </p:bg>
+    <p:spTree>
+      <p:nvGrpSpPr>
+        <p:cNvPr id="1" name=""/>
+        <p:cNvGrpSpPr/>
+        <p:nvPr/>
+      </p:nvGrpSpPr>
+      <p:grpSpPr>
+        <a:xfrm>
+          <a:off x="0" y="0"/>
+          <a:ext cx="0" cy="0"/>
+          <a:chOff x="0" y="0"/>
+          <a:chExt cx="0" cy="0"/>
+        </a:xfrm>
+      </p:grpSpPr>
+      <p:sp>
+        <p:nvSpPr>
+          <p:cNvPr id="2" name="Header Placeholder 1"/>
+          <p:cNvSpPr>
+            <a:spLocks noGrp="1"/>
+          </p:cNvSpPr>
+          <p:nvPr>
+            <p:ph type="hdr" sz="quarter"/>
+          </p:nvPr>
+        </p:nvSpPr>
+        <p:spPr>
+          <a:xfrm>
+            <a:off x="0" y="0"/>
+            <a:ext cx="2971800" cy="457200"/>
+          </a:xfrm>
+          <a:prstGeom prst="rect">
+            <a:avLst/>
+          </a:prstGeom>
+        </p:spPr>
+        <p:txBody>
+          <a:bodyPr vert="horz" lIns="91440" tIns="45720" rIns="91440" bIns="45720" rtlCol="0"/>
+          <a:lstStyle>
+            <a:lvl1pPr algn="l">
+              <a:defRPr sz="1200"/>
+            </a:lvl1pPr>
+          </a:lstStyle>
+          <a:p>
+            <a:endParaRPr lang="en-US"/>
+          </a:p>
+        </p:txBody>
+      </p:sp>
+      <p:sp>
+        <p:nvSpPr>
+          <p:cNvPr id="3" name="Date Placeholder 2"/>
+          <p:cNvSpPr>
+            <a:spLocks noGrp="1"/>
+          </p:cNvSpPr>
+          <p:nvPr>
+            <p:ph type="dt" idx="1"/>
+          </p:nvPr>
+        </p:nvSpPr>
+        <p:spPr>
+          <a:xfrm>
+            <a:off x="3884613" y="0"/>
+            <a:ext cx="2971800" cy="457200"/>
+          </a:xfrm>
+          <a:prstGeom prst="rect">
+            <a:avLst/>
+          </a:prstGeom>
+        </p:spPr>
+        <p:txBody>
+          <a:bodyPr vert="horz" lIns="91440" tIns="45720" rIns="91440" bIns="45720" rtlCol="0"/>
+          <a:lstStyle>
+            <a:lvl1pPr algn="r">
+              <a:defRPr sz="1200"/>
+            </a:lvl1pPr>
+          </a:lstStyle>
+          <a:p>
+            <a:fld id="{0F89C1C7-3DCD-1040-A9CF-14679D8B5DDD}" type="datetimeFigureOut">
+              <a:rPr lang="en-US" smtClean="0"/>
+              <a:t>10/17/16</a:t>
+            </a:fld>
+            <a:endParaRPr lang="en-US"/>
+          </a:p>
+        </p:txBody>
+      </p:sp>
+      <p:sp>
+        <p:nvSpPr>
+          <p:cNvPr id="4" name="Slide Image Placeholder 3"/>
+          <p:cNvSpPr>
+            <a:spLocks noGrp="1" noRot="1" noChangeAspect="1"/>
+          </p:cNvSpPr>
+          <p:nvPr>
+            <p:ph type="sldImg" idx="2"/>
+          </p:nvPr>
+        </p:nvSpPr>
+        <p:spPr>
+          <a:xfrm>
+            <a:off x="1143000" y="685800"/>
+            <a:ext cx="4572000" cy="3429000"/>
+          </a:xfrm>
+          <a:prstGeom prst="rect">
+            <a:avLst/>
+          </a:prstGeom>
+          <a:noFill/>
+          <a:ln w="12700">
+            <a:solidFill>
+              <a:prstClr val="black"/>
+            </a:solidFill>
+          </a:ln>
+        </p:spPr>
+        <p:txBody>
+          <a:bodyPr vert="horz" lIns="91440" tIns="45720" rIns="91440" bIns="45720" rtlCol="0" anchor="ctr"/>
+          <a:lstStyle/>
+          <a:p>
+            <a:endParaRPr lang="en-US"/>
+          </a:p>
+        </p:txBody>
+      </p:sp>
+      <p:sp>
+        <p:nvSpPr>
+          <p:cNvPr id="5" name="Notes Placeholder 4"/>
+          <p:cNvSpPr>
+            <a:spLocks noGrp="1"/>
+          </p:cNvSpPr>
+          <p:nvPr>
+            <p:ph type="body" sz="quarter" idx="3"/>
+          </p:nvPr>
+        </p:nvSpPr>
+        <p:spPr>
+          <a:xfrm>
+            <a:off x="685800" y="4343400"/>
+            <a:ext cx="5486400" cy="4114800"/>
+          </a:xfrm>
+          <a:prstGeom prst="rect">
+            <a:avLst/>
+          </a:prstGeom>
+        </p:spPr>
+        <p:txBody>
+          <a:bodyPr vert="horz" lIns="91440" tIns="45720" rIns="91440" bIns="45720" rtlCol="0"/>
+          <a:lstStyle/>
+          <a:p>
+            <a:pPr lvl="0"/>
+            <a:r>
+              <a:rPr lang="en-US" smtClean="0"/>
+              <a:t>Click to edit Master text styles</a:t>
+            </a:r>
+          </a:p>
+          <a:p>
+            <a:pPr lvl="1"/>
+            <a:r>
+              <a:rPr lang="en-US" smtClean="0"/>
+              <a:t>Second level</a:t>
+            </a:r>
+          </a:p>
+          <a:p>
+            <a:pPr lvl="2"/>
+            <a:r>
+              <a:rPr lang="en-US" smtClean="0"/>
+              <a:t>Third level</a:t>
+            </a:r>
+          </a:p>
+          <a:p>
+            <a:pPr lvl="3"/>
+            <a:r>
+              <a:rPr lang="en-US" smtClean="0"/>
+              <a:t>Fourth level</a:t>
+            </a:r>
+          </a:p>
+          <a:p>
+            <a:pPr lvl="4"/>
+            <a:r>
+              <a:rPr lang="en-US" smtClean="0"/>
+              <a:t>Fifth level</a:t>
+            </a:r>
+            <a:endParaRPr lang="en-US"/>
+          </a:p>
+        </p:txBody>
+      </p:sp>
+      <p:sp>
+        <p:nvSpPr>
+          <p:cNvPr id="6" name="Footer Placeholder 5"/>
+          <p:cNvSpPr>
+            <a:spLocks noGrp="1"/>
+          </p:cNvSpPr>
+          <p:nvPr>
+            <p:ph type="ftr" sz="quarter" idx="4"/>
+          </p:nvPr>
+        </p:nvSpPr>
+        <p:spPr>
+          <a:xfrm>
+            <a:off x="0" y="8685213"/>
+            <a:ext cx="2971800" cy="457200"/>
+          </a:xfrm>
+          <a:prstGeom prst="rect">
+            <a:avLst/>
+          </a:prstGeom>
+        </p:spPr>
+        <p:txBody>
+          <a:bodyPr vert="horz" lIns="91440" tIns="45720" rIns="91440" bIns="45720" rtlCol="0" anchor="b"/>
+          <a:lstStyle>
+            <a:lvl1pPr algn="l">
+              <a:defRPr sz="1200"/>
+            </a:lvl1pPr>
+          </a:lstStyle>
+          <a:p>
+            <a:endParaRPr lang="en-US"/>
+          </a:p>
+        </p:txBody>
+      </p:sp>
+      <p:sp>
+        <p:nvSpPr>
+          <p:cNvPr id="7" name="Slide Number Placeholder 6"/>
+          <p:cNvSpPr>
+            <a:spLocks noGrp="1"/>
+          </p:cNvSpPr>
+          <p:nvPr>
+            <p:ph type="sldNum" sz="quarter" idx="5"/>
+          </p:nvPr>
+        </p:nvSpPr>
+        <p:spPr>
+          <a:xfrm>
+            <a:off x="3884613" y="8685213"/>
+            <a:ext cx="2971800" cy="457200"/>
+          </a:xfrm>
+          <a:prstGeom prst="rect">
+            <a:avLst/>
+          </a:prstGeom>
+        </p:spPr>
+        <p:txBody>
+          <a:bodyPr vert="horz" lIns="91440" tIns="45720" rIns="91440" bIns="45720" rtlCol="0" anchor="b"/>
+          <a:lstStyle>
+            <a:lvl1pPr algn="r">
+              <a:defRPr sz="1200"/>
+            </a:lvl1pPr>
+          </a:lstStyle>
+          <a:p>
+            <a:fld id="{BB5E49A5-4136-284D-997B-48E1D791AD67}" type="slidenum">
+              <a:rPr lang="en-US" smtClean="0"/>
+              <a:t>‹#›</a:t>
+            </a:fld>
+            <a:endParaRPr lang="en-US"/>
+          </a:p>
+        </p:txBody>
+      </p:sp>
+    </p:spTree>
+    <p:extLst>
+      <p:ext uri="{BB962C8B-B14F-4D97-AF65-F5344CB8AC3E}">
+        <p14:creationId xmlns:p14="http://schemas.microsoft.com/office/powerpoint/2010/main" val="2623252185"/>
+      </p:ext>
+    </p:extLst>
+  </p:cSld>
+  <p:clrMap bg1="lt1" tx1="dk1" bg2="lt2" tx2="dk2" accent1="accent1" accent2="accent2" accent3="accent3" accent4="accent4" accent5="accent5" accent6="accent6" hlink="hlink" folHlink="folHlink"/>
+  <p:notesStyle>
+    <a:lvl1pPr marL="0" algn="l" defTabSz="457200" rtl="0" eaLnBrk="1" latinLnBrk="0" hangingPunct="1">
+      <a:defRPr sz="1200" kern="1200">
+        <a:solidFill>
+          <a:schemeClr val="tx1"/>
+        </a:solidFill>
+        <a:latin typeface="+mn-lt"/>
+        <a:ea typeface="+mn-ea"/>
+        <a:cs typeface="+mn-cs"/>
+      </a:defRPr>
+    </a:lvl1pPr>
+    <a:lvl2pPr marL="457200" algn="l" defTabSz="457200" rtl="0" eaLnBrk="1" latinLnBrk="0" hangingPunct="1">
+      <a:defRPr sz="1200" kern="1200">
+        <a:solidFill>
+          <a:schemeClr val="tx1"/>
+        </a:solidFill>
+        <a:latin typeface="+mn-lt"/>
+        <a:ea typeface="+mn-ea"/>
+        <a:cs typeface="+mn-cs"/>
+      </a:defRPr>
+    </a:lvl2pPr>
+    <a:lvl3pPr marL="914400" algn="l" defTabSz="457200" rtl="0" eaLnBrk="1" latinLnBrk="0" hangingPunct="1">
+      <a:defRPr sz="1200" kern="1200">
+        <a:solidFill>
+          <a:schemeClr val="tx1"/>
+        </a:solidFill>
+        <a:latin typeface="+mn-lt"/>
+        <a:ea typeface="+mn-ea"/>
+        <a:cs typeface="+mn-cs"/>
+      </a:defRPr>
+    </a:lvl3pPr>
+    <a:lvl4pPr marL="1371600" algn="l" defTabSz="457200" rtl="0" eaLnBrk="1" latinLnBrk="0" hangingPunct="1">
+      <a:defRPr sz="1200" kern="1200">
+        <a:solidFill>
+          <a:schemeClr val="tx1"/>
+        </a:solidFill>
+        <a:latin typeface="+mn-lt"/>
+        <a:ea typeface="+mn-ea"/>
+        <a:cs typeface="+mn-cs"/>
+      </a:defRPr>
+    </a:lvl4pPr>
+    <a:lvl5pPr marL="1828800" algn="l" defTabSz="457200" rtl="0" eaLnBrk="1" latinLnBrk="0" hangingPunct="1">
+      <a:defRPr sz="1200" kern="1200">
+        <a:solidFill>
+          <a:schemeClr val="tx1"/>
+        </a:solidFill>
+        <a:latin typeface="+mn-lt"/>
+        <a:ea typeface="+mn-ea"/>
+        <a:cs typeface="+mn-cs"/>
+      </a:defRPr>
+    </a:lvl5pPr>
+    <a:lvl6pPr marL="2286000" algn="l" defTabSz="457200" rtl="0" eaLnBrk="1" latinLnBrk="0" hangingPunct="1">
+      <a:defRPr sz="1200" kern="1200">
+        <a:solidFill>
+          <a:schemeClr val="tx1"/>
+        </a:solidFill>
+        <a:latin typeface="+mn-lt"/>
+        <a:ea typeface="+mn-ea"/>
+        <a:cs typeface="+mn-cs"/>
+      </a:defRPr>
+    </a:lvl6pPr>
+    <a:lvl7pPr marL="2743200" algn="l" defTabSz="457200" rtl="0" eaLnBrk="1" latinLnBrk="0" hangingPunct="1">
+      <a:defRPr sz="1200" kern="1200">
+        <a:solidFill>
+          <a:schemeClr val="tx1"/>
+        </a:solidFill>
+        <a:latin typeface="+mn-lt"/>
+        <a:ea typeface="+mn-ea"/>
+        <a:cs typeface="+mn-cs"/>
+      </a:defRPr>
+    </a:lvl7pPr>
+    <a:lvl8pPr marL="3200400" algn="l" defTabSz="457200" rtl="0" eaLnBrk="1" latinLnBrk="0" hangingPunct="1">
+      <a:defRPr sz="1200" kern="1200">
+        <a:solidFill>
+          <a:schemeClr val="tx1"/>
+        </a:solidFill>
+        <a:latin typeface="+mn-lt"/>
+        <a:ea typeface="+mn-ea"/>
+        <a:cs typeface="+mn-cs"/>
+      </a:defRPr>
+    </a:lvl8pPr>
+    <a:lvl9pPr marL="3657600" algn="l" defTabSz="457200" rtl="0" eaLnBrk="1" latinLnBrk="0" hangingPunct="1">
+      <a:defRPr sz="1200" kern="1200">
+        <a:solidFill>
+          <a:schemeClr val="tx1"/>
+        </a:solidFill>
+        <a:latin typeface="+mn-lt"/>
+        <a:ea typeface="+mn-ea"/>
+        <a:cs typeface="+mn-cs"/>
+      </a:defRPr>
+    </a:lvl9pPr>
+  </p:notesStyle>
+</p:notesMaster>
+</file>
+
+<file path=ppt/notesSlides/notesSlide1.xml><?xml version="1.0" encoding="utf-8"?>
+<p:notes xmlns:a="http://schemas.openxmlformats.org/drawingml/2006/main" xmlns:p="http://schemas.openxmlformats.org/presentationml/2006/main" xmlns:r="http://schemas.openxmlformats.org/officeDocument/2006/relationships">
+  <p:cSld>
+    <p:spTree>
+      <p:nvGrpSpPr>
+        <p:cNvPr id="1" name=""/>
+        <p:cNvGrpSpPr/>
+        <p:nvPr/>
+      </p:nvGrpSpPr>
+      <p:grpSpPr>
+        <a:xfrm>
+          <a:off x="0" y="0"/>
+          <a:ext cx="0" cy="0"/>
+          <a:chOff x="0" y="0"/>
+          <a:chExt cx="0" cy="0"/>
+        </a:xfrm>
+      </p:grpSpPr>
+      <p:sp>
+        <p:nvSpPr>
+          <p:cNvPr id="2" name="Slide Image Placeholder 1"/>
+          <p:cNvSpPr>
+            <a:spLocks noGrp="1"/>
+          </p:cNvSpPr>
+          <p:nvPr>
+            <p:ph type="sldImg" idx="2"/>
+          </p:nvPr>
+        </p:nvSpPr>
+        <p:spPr/>
+      </p:sp>
+      <p:sp>
+        <p:nvSpPr>
+          <p:cNvPr id="3" name="Notes Placeholder 2"/>
+          <p:cNvSpPr>
+            <a:spLocks noGrp="1"/>
+          </p:cNvSpPr>
+          <p:nvPr>
+            <p:ph type="body" idx="3" sz="quarter"/>
+          </p:nvPr>
+        </p:nvSpPr>
+        <p:spPr/>
+        <p:txBody>
+          <a:bodyPr/>
+          <a:lstStyle/>
+          <a:p>
+            <a:r>
+              <a:t>Aula 8. Transformamos segurança em processo automatizado e repetível (DevSecOps) e aprendemos a proteger a cadeia de suprimentos de software. Entregável: pipeline como gerador de evidência + SBOM (Fase 6).</a:t>
+            </a:r>
+          </a:p>
+        </p:txBody>
+      </p:sp>
+      <p:sp>
+        <p:nvSpPr>
+          <p:cNvPr id="4" name="Slide Number Placeholder 3"/>
+          <p:cNvSpPr>
+            <a:spLocks noGrp="1"/>
+          </p:cNvSpPr>
+          <p:nvPr>
+            <p:ph type="sldNum" idx="5" sz="quarter"/>
+          </p:nvPr>
+        </p:nvSpPr>
+        <p:spPr/>
+      </p:sp>
+    </p:spTree>
+  </p:cSld>
+  <p:clrMapOvr>
+    <a:masterClrMapping/>
+  </p:clrMapOvr>
+</p:notes>
+</file>
+
+<file path=ppt/notesSlides/notesSlide2.xml><?xml version="1.0" encoding="utf-8"?>
+<p:notes xmlns:a="http://schemas.openxmlformats.org/drawingml/2006/main" xmlns:p="http://schemas.openxmlformats.org/presentationml/2006/main" xmlns:r="http://schemas.openxmlformats.org/officeDocument/2006/relationships">
+  <p:cSld>
+    <p:spTree>
+      <p:nvGrpSpPr>
+        <p:cNvPr id="1" name=""/>
+        <p:cNvGrpSpPr/>
+        <p:nvPr/>
+      </p:nvGrpSpPr>
+      <p:grpSpPr>
+        <a:xfrm>
+          <a:off x="0" y="0"/>
+          <a:ext cx="0" cy="0"/>
+          <a:chOff x="0" y="0"/>
+          <a:chExt cx="0" cy="0"/>
+        </a:xfrm>
+      </p:grpSpPr>
+      <p:sp>
+        <p:nvSpPr>
+          <p:cNvPr id="2" name="Slide Image Placeholder 1"/>
+          <p:cNvSpPr>
+            <a:spLocks noGrp="1"/>
+          </p:cNvSpPr>
+          <p:nvPr>
+            <p:ph type="sldImg" idx="2"/>
+          </p:nvPr>
+        </p:nvSpPr>
+        <p:spPr/>
+      </p:sp>
+      <p:sp>
+        <p:nvSpPr>
+          <p:cNvPr id="3" name="Notes Placeholder 2"/>
+          <p:cNvSpPr>
+            <a:spLocks noGrp="1"/>
+          </p:cNvSpPr>
+          <p:nvPr>
+            <p:ph type="body" idx="3" sz="quarter"/>
+          </p:nvPr>
+        </p:nvSpPr>
+        <p:spPr/>
+        <p:txBody>
+          <a:bodyPr/>
+          <a:lstStyle/>
+          <a:p>
+            <a:r>
+              <a:t>'Security is everyone's job, but it's still someone's specialty.' DevSecOps é cultura: devs aprendem segurança, o time de segurança provê ferramentas, e o pipeline oferece guardrails (ajuda a fazer certo) em vez de só gates que bloqueiam. Post-mortem sem culpados gera aprendizado, não medo.</a:t>
+            </a:r>
+          </a:p>
+        </p:txBody>
+      </p:sp>
+      <p:sp>
+        <p:nvSpPr>
+          <p:cNvPr id="4" name="Slide Number Placeholder 3"/>
+          <p:cNvSpPr>
+            <a:spLocks noGrp="1"/>
+          </p:cNvSpPr>
+          <p:nvPr>
+            <p:ph type="sldNum" idx="5" sz="quarter"/>
+          </p:nvPr>
+        </p:nvSpPr>
+        <p:spPr/>
+      </p:sp>
+    </p:spTree>
+  </p:cSld>
+  <p:clrMapOvr>
+    <a:masterClrMapping/>
+  </p:clrMapOvr>
+</p:notes>
+</file>
+
+<file path=ppt/notesSlides/notesSlide3.xml><?xml version="1.0" encoding="utf-8"?>
+<p:notes xmlns:a="http://schemas.openxmlformats.org/drawingml/2006/main" xmlns:p="http://schemas.openxmlformats.org/presentationml/2006/main" xmlns:r="http://schemas.openxmlformats.org/officeDocument/2006/relationships">
+  <p:cSld>
+    <p:spTree>
+      <p:nvGrpSpPr>
+        <p:cNvPr id="1" name=""/>
+        <p:cNvGrpSpPr/>
+        <p:nvPr/>
+      </p:nvGrpSpPr>
+      <p:grpSpPr>
+        <a:xfrm>
+          <a:off x="0" y="0"/>
+          <a:ext cx="0" cy="0"/>
+          <a:chOff x="0" y="0"/>
+          <a:chExt cx="0" cy="0"/>
+        </a:xfrm>
+      </p:grpSpPr>
+      <p:sp>
+        <p:nvSpPr>
+          <p:cNvPr id="2" name="Slide Image Placeholder 1"/>
+          <p:cNvSpPr>
+            <a:spLocks noGrp="1"/>
+          </p:cNvSpPr>
+          <p:nvPr>
+            <p:ph type="sldImg" idx="2"/>
+          </p:nvPr>
+        </p:nvSpPr>
+        <p:spPr/>
+      </p:sp>
+      <p:sp>
+        <p:nvSpPr>
+          <p:cNvPr id="3" name="Notes Placeholder 2"/>
+          <p:cNvSpPr>
+            <a:spLocks noGrp="1"/>
+          </p:cNvSpPr>
+          <p:nvPr>
+            <p:ph type="body" idx="3" sz="quarter"/>
+          </p:nvPr>
+        </p:nvSpPr>
+        <p:spPr/>
+        <p:txBody>
+          <a:bodyPr/>
+          <a:lstStyle/>
+          <a:p>
+            <a:r>
+              <a:t>Ataques a supply chain cresceram +742%. Defesas: SBOM (a 'lista de ingredientes' do software, legível por máquina); SLSA (níveis de garantia da proveniência do build — meta acadêmica: L2, build com proveniência assinada); Sigstore/cosign (assinar artefatos por identidade OIDC, sem gerenciar chaves de longa duração). O próprio pipeline é alvo de alto valor — trate-o como sistema crítico.</a:t>
+            </a:r>
+          </a:p>
+        </p:txBody>
+      </p:sp>
+      <p:sp>
+        <p:nvSpPr>
+          <p:cNvPr id="4" name="Slide Number Placeholder 3"/>
+          <p:cNvSpPr>
+            <a:spLocks noGrp="1"/>
+          </p:cNvSpPr>
+          <p:nvPr>
+            <p:ph type="sldNum" idx="5" sz="quarter"/>
+          </p:nvPr>
+        </p:nvSpPr>
+        <p:spPr/>
+      </p:sp>
+    </p:spTree>
+  </p:cSld>
+  <p:clrMapOvr>
+    <a:masterClrMapping/>
+  </p:clrMapOvr>
+</p:notes>
+</file>
+
+<file path=ppt/notesSlides/notesSlide4.xml><?xml version="1.0" encoding="utf-8"?>
+<p:notes xmlns:a="http://schemas.openxmlformats.org/drawingml/2006/main" xmlns:p="http://schemas.openxmlformats.org/presentationml/2006/main" xmlns:r="http://schemas.openxmlformats.org/officeDocument/2006/relationships">
+  <p:cSld>
+    <p:spTree>
+      <p:nvGrpSpPr>
+        <p:cNvPr id="1" name=""/>
+        <p:cNvGrpSpPr/>
+        <p:nvPr/>
+      </p:nvGrpSpPr>
+      <p:grpSpPr>
+        <a:xfrm>
+          <a:off x="0" y="0"/>
+          <a:ext cx="0" cy="0"/>
+          <a:chOff x="0" y="0"/>
+          <a:chExt cx="0" cy="0"/>
+        </a:xfrm>
+      </p:grpSpPr>
+      <p:sp>
+        <p:nvSpPr>
+          <p:cNvPr id="2" name="Slide Image Placeholder 1"/>
+          <p:cNvSpPr>
+            <a:spLocks noGrp="1"/>
+          </p:cNvSpPr>
+          <p:nvPr>
+            <p:ph type="sldImg" idx="2"/>
+          </p:nvPr>
+        </p:nvSpPr>
+        <p:spPr/>
+      </p:sp>
+      <p:sp>
+        <p:nvSpPr>
+          <p:cNvPr id="3" name="Notes Placeholder 2"/>
+          <p:cNvSpPr>
+            <a:spLocks noGrp="1"/>
+          </p:cNvSpPr>
+          <p:nvPr>
+            <p:ph type="body" idx="3" sz="quarter"/>
+          </p:nvPr>
+        </p:nvSpPr>
+        <p:spPr/>
+        <p:txBody>
+          <a:bodyPr/>
+          <a:lstStyle/>
+          <a:p>
+            <a:r>
+              <a:t>Vulnerability management moderno não usa só CVSS: um CVSS 10 com EPSS baixo e fora do KEV é importante, mas não urgente; um CVSS 7 no KEV é urgente (está sendo explorado AGORA). Combine CVSS × EPSS × KEV para priorizar. O VEX documenta quando sua aplicação não é afetada por uma CVE, evitando trabalho desnecessário.</a:t>
+            </a:r>
+          </a:p>
+        </p:txBody>
+      </p:sp>
+      <p:sp>
+        <p:nvSpPr>
+          <p:cNvPr id="4" name="Slide Number Placeholder 3"/>
+          <p:cNvSpPr>
+            <a:spLocks noGrp="1"/>
+          </p:cNvSpPr>
+          <p:nvPr>
+            <p:ph type="sldNum" idx="5" sz="quarter"/>
+          </p:nvPr>
+        </p:nvSpPr>
+        <p:spPr/>
+      </p:sp>
+    </p:spTree>
+  </p:cSld>
+  <p:clrMapOvr>
+    <a:masterClrMapping/>
+  </p:clrMapOvr>
+</p:notes>
+</file>
+
+<file path=ppt/notesSlides/notesSlide5.xml><?xml version="1.0" encoding="utf-8"?>
+<p:notes xmlns:a="http://schemas.openxmlformats.org/drawingml/2006/main" xmlns:p="http://schemas.openxmlformats.org/presentationml/2006/main" xmlns:r="http://schemas.openxmlformats.org/officeDocument/2006/relationships">
+  <p:cSld>
+    <p:spTree>
+      <p:nvGrpSpPr>
+        <p:cNvPr id="1" name=""/>
+        <p:cNvGrpSpPr/>
+        <p:nvPr/>
+      </p:nvGrpSpPr>
+      <p:grpSpPr>
+        <a:xfrm>
+          <a:off x="0" y="0"/>
+          <a:ext cx="0" cy="0"/>
+          <a:chOff x="0" y="0"/>
+          <a:chExt cx="0" cy="0"/>
+        </a:xfrm>
+      </p:grpSpPr>
+      <p:sp>
+        <p:nvSpPr>
+          <p:cNvPr id="2" name="Slide Image Placeholder 1"/>
+          <p:cNvSpPr>
+            <a:spLocks noGrp="1"/>
+          </p:cNvSpPr>
+          <p:nvPr>
+            <p:ph type="sldImg" idx="2"/>
+          </p:nvPr>
+        </p:nvSpPr>
+        <p:spPr/>
+      </p:sp>
+      <p:sp>
+        <p:nvSpPr>
+          <p:cNvPr id="3" name="Notes Placeholder 2"/>
+          <p:cNvSpPr>
+            <a:spLocks noGrp="1"/>
+          </p:cNvSpPr>
+          <p:nvPr>
+            <p:ph type="body" idx="3" sz="quarter"/>
+          </p:nvPr>
+        </p:nvSpPr>
+        <p:spPr/>
+        <p:txBody>
+          <a:bodyPr/>
+          <a:lstStyle/>
+          <a:p>
+            <a:r>
+              <a:t>O pipeline do VidaPlus já sobe com os gates. Nesta fase o grupo o consolida como gerador de EVIDÊNCIA (não como a nota — a nota vem do dossiê e da defesa). Documente quais gates ficaram verdes e tornou bloqueantes, gere o SBOM e, como bônus, assine a imagem. Nem todos os gates precisam ficar verdes — só os das PoCs; os demais sustentam o plano de remediação.</a:t>
+            </a:r>
+          </a:p>
+        </p:txBody>
+      </p:sp>
+      <p:sp>
+        <p:nvSpPr>
+          <p:cNvPr id="4" name="Slide Number Placeholder 3"/>
+          <p:cNvSpPr>
+            <a:spLocks noGrp="1"/>
+          </p:cNvSpPr>
+          <p:nvPr>
+            <p:ph type="sldNum" idx="5" sz="quarter"/>
+          </p:nvPr>
+        </p:nvSpPr>
+        <p:spPr/>
+      </p:sp>
+    </p:spTree>
+  </p:cSld>
+  <p:clrMapOvr>
+    <a:masterClrMapping/>
+  </p:clrMapOvr>
+</p:notes>
 </file>
 
 <file path=ppt/slideLayouts/slideLayout1.xml><?xml version="1.0" encoding="utf-8"?>
@@ -3957,7 +4657,7 @@
                 </a:solidFill>
                 <a:latin typeface="Open Sans"/>
               </a:rPr>
-              <a:t>1 dev por squad como elo</a:t>
+              <a:t>1 dev por squad com treino extra, como elo</a:t>
             </a:r>
           </a:p>
         </p:txBody>
@@ -4093,7 +4793,7 @@
                 </a:solidFill>
                 <a:latin typeface="Open Sans"/>
               </a:rPr>
-              <a:t>leve, por feature</a:t>
+              <a:t>sessão leve a cada feature relevante</a:t>
             </a:r>
           </a:p>
         </p:txBody>
@@ -4229,7 +4929,7 @@
                 </a:solidFill>
                 <a:latin typeface="Open Sans"/>
               </a:rPr>
-              <a:t>ajudar a fazer certo, não só bloquear</a:t>
+              <a:t>o pipeline ajuda a fazer certo, não só bloqueia</a:t>
             </a:r>
           </a:p>
         </p:txBody>
@@ -4365,7 +5065,7 @@
                 </a:solidFill>
                 <a:latin typeface="Open Sans"/>
               </a:rPr>
-              <a:t>foco no sistema, não na pessoa</a:t>
+              <a:t>pós-incidente foca no sistema, não na pessoa</a:t>
             </a:r>
           </a:p>
         </p:txBody>
@@ -4939,7 +5639,7 @@
                 </a:solidFill>
                 <a:latin typeface="Open Sans"/>
               </a:rPr>
-              <a:t>inventário de componentes (CycloneDX/SPDX)</a:t>
+              <a:t>inventário de todos os componentes (CycloneDX/SPDX)</a:t>
             </a:r>
           </a:p>
         </p:txBody>
@@ -5075,7 +5775,7 @@
                 </a:solidFill>
                 <a:latin typeface="Open Sans"/>
               </a:rPr>
-              <a:t>níveis de proveniência L0-&gt;L3</a:t>
+              <a:t>níveis de proveniência do artefato (L0 -&gt; L3)</a:t>
             </a:r>
           </a:p>
         </p:txBody>
@@ -5211,7 +5911,7 @@
                 </a:solidFill>
                 <a:latin typeface="Open Sans"/>
               </a:rPr>
-              <a:t>assinatura por identidade (OIDC)</a:t>
+              <a:t>assinar por identidade (OIDC), sem gerir chaves</a:t>
             </a:r>
           </a:p>
         </p:txBody>
@@ -5544,7 +6244,7 @@
                 </a:solidFill>
                 <a:latin typeface="Open Sans"/>
               </a:rPr>
-              <a:t>Não basta o CVSS</a:t>
+              <a:t>Não basta o CVSS — precisa de contexto real</a:t>
             </a:r>
           </a:p>
         </p:txBody>
@@ -5949,7 +6649,7 @@
                 </a:solidFill>
                 <a:latin typeface="Open Sans"/>
               </a:rPr>
-              <a:t>Scoring System</a:t>
+              <a:t>Common Vulnerability Scoring System</a:t>
             </a:r>
           </a:p>
         </p:txBody>
@@ -5994,7 +6694,7 @@
                 </a:solidFill>
                 <a:latin typeface="Open Sans"/>
               </a:rPr>
-              <a:t>gravidade 0–10 por vetor</a:t>
+              <a:t>gravidade 0-10 por vetor</a:t>
             </a:r>
           </a:p>
         </p:txBody>
@@ -6174,7 +6874,7 @@
                 </a:solidFill>
                 <a:latin typeface="Open Sans"/>
               </a:rPr>
-              <a:t>Exploit Prediction</a:t>
+              <a:t>Exploit Prediction Scoring System</a:t>
             </a:r>
           </a:p>
         </p:txBody>
@@ -6219,7 +6919,7 @@
                 </a:solidFill>
                 <a:latin typeface="Open Sans"/>
               </a:rPr>
-              <a:t>probabilidade de exploração em 30 dias</a:t>
+              <a:t>prob. de exploração em 30 dias</a:t>
             </a:r>
           </a:p>
         </p:txBody>
@@ -6399,7 +7099,7 @@
                 </a:solidFill>
                 <a:latin typeface="Open Sans"/>
               </a:rPr>
-              <a:t>Known Exploited Vulns</a:t>
+              <a:t>Known Exploited Vulnerabilities</a:t>
             </a:r>
           </a:p>
         </p:txBody>
@@ -6444,7 +7144,7 @@
                 </a:solidFill>
                 <a:latin typeface="Open Sans"/>
               </a:rPr>
-              <a:t>já explorado -&gt; patch obrigatório</a:t>
+              <a:t>já explorada -&gt; patch obrigatório</a:t>
             </a:r>
           </a:p>
         </p:txBody>
@@ -6624,7 +7324,7 @@
                 </a:solidFill>
                 <a:latin typeface="Open Sans"/>
               </a:rPr>
-              <a:t>Exploitability eXchange</a:t>
+              <a:t>Vulnerability Exploitability eXchange</a:t>
             </a:r>
           </a:p>
         </p:txBody>
@@ -7213,7 +7913,7 @@
                 </a:solidFill>
                 <a:latin typeface="Open Sans"/>
               </a:rPr>
-              <a:t>documente a evolução vermelho -&gt; verde.</a:t>
+              <a:t>documente a evolução vermelho -&gt; verde do seu pacote.</a:t>
             </a:r>
           </a:p>
           <a:p>
@@ -7250,7 +7950,7 @@
                 </a:solidFill>
                 <a:latin typeface="Open Sans"/>
               </a:rPr>
-              <a:t>gerado no CI (CycloneDX).</a:t>
+              <a:t>gerado no CI (CycloneDX) e anexado.</a:t>
             </a:r>
           </a:p>
           <a:p>
@@ -7287,7 +7987,7 @@
                 </a:solidFill>
                 <a:latin typeface="Open Sans"/>
               </a:rPr>
-              <a:t>o secret scanning deve ficar verde.</a:t>
+              <a:t>o gate de secret scanning deve ficar verde.</a:t>
             </a:r>
           </a:p>
           <a:p>
@@ -7324,7 +8024,7 @@
                 </a:solidFill>
                 <a:latin typeface="Open Sans"/>
               </a:rPr>
-              <a:t>assinar a imagem com cosign (SLSA L2).</a:t>
+              <a:t>assinar a imagem do backend com cosign (SLSA L2).</a:t>
             </a:r>
           </a:p>
           <a:p>
@@ -8047,4 +8747,324 @@
   </a:objectDefaults>
   <a:extraClrSchemeLst/>
 </a:theme>
+</file>
+
+<file path=ppt/theme/theme2.xml><?xml version="1.0" encoding="utf-8"?>
+<a:theme xmlns:a="http://schemas.openxmlformats.org/drawingml/2006/main" name="Office Theme">
+  <a:themeElements>
+    <a:clrScheme name="Office">
+      <a:dk1>
+        <a:sysClr val="windowText" lastClr="000000"/>
+      </a:dk1>
+      <a:lt1>
+        <a:sysClr val="window" lastClr="FFFFFF"/>
+      </a:lt1>
+      <a:dk2>
+        <a:srgbClr val="1F497D"/>
+      </a:dk2>
+      <a:lt2>
+        <a:srgbClr val="EEECE1"/>
+      </a:lt2>
+      <a:accent1>
+        <a:srgbClr val="4F81BD"/>
+      </a:accent1>
+      <a:accent2>
+        <a:srgbClr val="C0504D"/>
+      </a:accent2>
+      <a:accent3>
+        <a:srgbClr val="9BBB59"/>
+      </a:accent3>
+      <a:accent4>
+        <a:srgbClr val="8064A2"/>
+      </a:accent4>
+      <a:accent5>
+        <a:srgbClr val="4BACC6"/>
+      </a:accent5>
+      <a:accent6>
+        <a:srgbClr val="F79646"/>
+      </a:accent6>
+      <a:hlink>
+        <a:srgbClr val="0000FF"/>
+      </a:hlink>
+      <a:folHlink>
+        <a:srgbClr val="800080"/>
+      </a:folHlink>
+    </a:clrScheme>
+    <a:fontScheme name="Office">
+      <a:majorFont>
+        <a:latin typeface="Calibri"/>
+        <a:ea typeface=""/>
+        <a:cs typeface=""/>
+        <a:font script="Jpan" typeface="ＭＳ Ｐゴシック"/>
+        <a:font script="Hang" typeface="맑은 고딕"/>
+        <a:font script="Hans" typeface="宋体"/>
+        <a:font script="Hant" typeface="新細明體"/>
+        <a:font script="Arab" typeface="Times New Roman"/>
+        <a:font script="Hebr" typeface="Times New Roman"/>
+        <a:font script="Thai" typeface="Angsana New"/>
+        <a:font script="Ethi" typeface="Nyala"/>
+        <a:font script="Beng" typeface="Vrinda"/>
+        <a:font script="Gujr" typeface="Shruti"/>
+        <a:font script="Khmr" typeface="MoolBoran"/>
+        <a:font script="Knda" typeface="Tunga"/>
+        <a:font script="Guru" typeface="Raavi"/>
+        <a:font script="Cans" typeface="Euphemia"/>
+        <a:font script="Cher" typeface="Plantagenet Cherokee"/>
+        <a:font script="Yiii" typeface="Microsoft Yi Baiti"/>
+        <a:font script="Tibt" typeface="Microsoft Himalaya"/>
+        <a:font script="Thaa" typeface="MV Boli"/>
+        <a:font script="Deva" typeface="Mangal"/>
+        <a:font script="Telu" typeface="Gautami"/>
+        <a:font script="Taml" typeface="Latha"/>
+        <a:font script="Syrc" typeface="Estrangelo Edessa"/>
+        <a:font script="Orya" typeface="Kalinga"/>
+        <a:font script="Mlym" typeface="Kartika"/>
+        <a:font script="Laoo" typeface="DokChampa"/>
+        <a:font script="Sinh" typeface="Iskoola Pota"/>
+        <a:font script="Mong" typeface="Mongolian Baiti"/>
+        <a:font script="Viet" typeface="Times New Roman"/>
+        <a:font script="Uigh" typeface="Microsoft Uighur"/>
+        <a:font script="Geor" typeface="Sylfaen"/>
+      </a:majorFont>
+      <a:minorFont>
+        <a:latin typeface="Calibri"/>
+        <a:ea typeface=""/>
+        <a:cs typeface=""/>
+        <a:font script="Jpan" typeface="ＭＳ Ｐゴシック"/>
+        <a:font script="Hang" typeface="맑은 고딕"/>
+        <a:font script="Hans" typeface="宋体"/>
+        <a:font script="Hant" typeface="新細明體"/>
+        <a:font script="Arab" typeface="Arial"/>
+        <a:font script="Hebr" typeface="Arial"/>
+        <a:font script="Thai" typeface="Cordia New"/>
+        <a:font script="Ethi" typeface="Nyala"/>
+        <a:font script="Beng" typeface="Vrinda"/>
+        <a:font script="Gujr" typeface="Shruti"/>
+        <a:font script="Khmr" typeface="DaunPenh"/>
+        <a:font script="Knda" typeface="Tunga"/>
+        <a:font script="Guru" typeface="Raavi"/>
+        <a:font script="Cans" typeface="Euphemia"/>
+        <a:font script="Cher" typeface="Plantagenet Cherokee"/>
+        <a:font script="Yiii" typeface="Microsoft Yi Baiti"/>
+        <a:font script="Tibt" typeface="Microsoft Himalaya"/>
+        <a:font script="Thaa" typeface="MV Boli"/>
+        <a:font script="Deva" typeface="Mangal"/>
+        <a:font script="Telu" typeface="Gautami"/>
+        <a:font script="Taml" typeface="Latha"/>
+        <a:font script="Syrc" typeface="Estrangelo Edessa"/>
+        <a:font script="Orya" typeface="Kalinga"/>
+        <a:font script="Mlym" typeface="Kartika"/>
+        <a:font script="Laoo" typeface="DokChampa"/>
+        <a:font script="Sinh" typeface="Iskoola Pota"/>
+        <a:font script="Mong" typeface="Mongolian Baiti"/>
+        <a:font script="Viet" typeface="Arial"/>
+        <a:font script="Uigh" typeface="Microsoft Uighur"/>
+        <a:font script="Geor" typeface="Sylfaen"/>
+      </a:minorFont>
+    </a:fontScheme>
+    <a:fmtScheme name="Office">
+      <a:fillStyleLst>
+        <a:solidFill>
+          <a:schemeClr val="phClr"/>
+        </a:solidFill>
+        <a:gradFill rotWithShape="1">
+          <a:gsLst>
+            <a:gs pos="0">
+              <a:schemeClr val="phClr">
+                <a:tint val="50000"/>
+                <a:satMod val="300000"/>
+              </a:schemeClr>
+            </a:gs>
+            <a:gs pos="35000">
+              <a:schemeClr val="phClr">
+                <a:tint val="37000"/>
+                <a:satMod val="300000"/>
+              </a:schemeClr>
+            </a:gs>
+            <a:gs pos="100000">
+              <a:schemeClr val="phClr">
+                <a:tint val="15000"/>
+                <a:satMod val="350000"/>
+              </a:schemeClr>
+            </a:gs>
+          </a:gsLst>
+          <a:lin ang="16200000" scaled="1"/>
+        </a:gradFill>
+        <a:gradFill rotWithShape="1">
+          <a:gsLst>
+            <a:gs pos="0">
+              <a:schemeClr val="phClr">
+                <a:tint val="100000"/>
+                <a:shade val="100000"/>
+                <a:satMod val="130000"/>
+              </a:schemeClr>
+            </a:gs>
+            <a:gs pos="100000">
+              <a:schemeClr val="phClr">
+                <a:tint val="50000"/>
+                <a:shade val="100000"/>
+                <a:satMod val="350000"/>
+              </a:schemeClr>
+            </a:gs>
+          </a:gsLst>
+          <a:lin ang="16200000" scaled="0"/>
+        </a:gradFill>
+      </a:fillStyleLst>
+      <a:lnStyleLst>
+        <a:ln w="9525" cap="flat" cmpd="sng" algn="ctr">
+          <a:solidFill>
+            <a:schemeClr val="phClr">
+              <a:shade val="95000"/>
+              <a:satMod val="105000"/>
+            </a:schemeClr>
+          </a:solidFill>
+          <a:prstDash val="solid"/>
+        </a:ln>
+        <a:ln w="25400" cap="flat" cmpd="sng" algn="ctr">
+          <a:solidFill>
+            <a:schemeClr val="phClr"/>
+          </a:solidFill>
+          <a:prstDash val="solid"/>
+        </a:ln>
+        <a:ln w="38100" cap="flat" cmpd="sng" algn="ctr">
+          <a:solidFill>
+            <a:schemeClr val="phClr"/>
+          </a:solidFill>
+          <a:prstDash val="solid"/>
+        </a:ln>
+      </a:lnStyleLst>
+      <a:effectStyleLst>
+        <a:effectStyle>
+          <a:effectLst>
+            <a:outerShdw blurRad="40000" dist="20000" dir="5400000" rotWithShape="0">
+              <a:srgbClr val="000000">
+                <a:alpha val="38000"/>
+              </a:srgbClr>
+            </a:outerShdw>
+          </a:effectLst>
+        </a:effectStyle>
+        <a:effectStyle>
+          <a:effectLst>
+            <a:outerShdw blurRad="40000" dist="23000" dir="5400000" rotWithShape="0">
+              <a:srgbClr val="000000">
+                <a:alpha val="35000"/>
+              </a:srgbClr>
+            </a:outerShdw>
+          </a:effectLst>
+        </a:effectStyle>
+        <a:effectStyle>
+          <a:effectLst>
+            <a:outerShdw blurRad="40000" dist="23000" dir="5400000" rotWithShape="0">
+              <a:srgbClr val="000000">
+                <a:alpha val="35000"/>
+              </a:srgbClr>
+            </a:outerShdw>
+          </a:effectLst>
+          <a:scene3d>
+            <a:camera prst="orthographicFront">
+              <a:rot lat="0" lon="0" rev="0"/>
+            </a:camera>
+            <a:lightRig rig="threePt" dir="t">
+              <a:rot lat="0" lon="0" rev="1200000"/>
+            </a:lightRig>
+          </a:scene3d>
+          <a:sp3d>
+            <a:bevelT w="63500" h="25400"/>
+          </a:sp3d>
+        </a:effectStyle>
+      </a:effectStyleLst>
+      <a:bgFillStyleLst>
+        <a:solidFill>
+          <a:schemeClr val="phClr"/>
+        </a:solidFill>
+        <a:gradFill rotWithShape="1">
+          <a:gsLst>
+            <a:gs pos="0">
+              <a:schemeClr val="phClr">
+                <a:tint val="40000"/>
+                <a:satMod val="350000"/>
+              </a:schemeClr>
+            </a:gs>
+            <a:gs pos="40000">
+              <a:schemeClr val="phClr">
+                <a:tint val="45000"/>
+                <a:shade val="99000"/>
+                <a:satMod val="350000"/>
+              </a:schemeClr>
+            </a:gs>
+            <a:gs pos="100000">
+              <a:schemeClr val="phClr">
+                <a:shade val="20000"/>
+                <a:satMod val="255000"/>
+              </a:schemeClr>
+            </a:gs>
+          </a:gsLst>
+          <a:path path="circle">
+            <a:fillToRect l="50000" t="-80000" r="50000" b="180000"/>
+          </a:path>
+        </a:gradFill>
+        <a:gradFill rotWithShape="1">
+          <a:gsLst>
+            <a:gs pos="0">
+              <a:schemeClr val="phClr">
+                <a:tint val="80000"/>
+                <a:satMod val="300000"/>
+              </a:schemeClr>
+            </a:gs>
+            <a:gs pos="100000">
+              <a:schemeClr val="phClr">
+                <a:shade val="30000"/>
+                <a:satMod val="200000"/>
+              </a:schemeClr>
+            </a:gs>
+          </a:gsLst>
+          <a:path path="circle">
+            <a:fillToRect l="50000" t="50000" r="50000" b="50000"/>
+          </a:path>
+        </a:gradFill>
+      </a:bgFillStyleLst>
+    </a:fmtScheme>
+  </a:themeElements>
+  <a:objectDefaults>
+    <a:spDef>
+      <a:spPr/>
+      <a:bodyPr/>
+      <a:lstStyle/>
+      <a:style>
+        <a:lnRef idx="1">
+          <a:schemeClr val="accent1"/>
+        </a:lnRef>
+        <a:fillRef idx="3">
+          <a:schemeClr val="accent1"/>
+        </a:fillRef>
+        <a:effectRef idx="2">
+          <a:schemeClr val="accent1"/>
+        </a:effectRef>
+        <a:fontRef idx="minor">
+          <a:schemeClr val="lt1"/>
+        </a:fontRef>
+      </a:style>
+    </a:spDef>
+    <a:lnDef>
+      <a:spPr/>
+      <a:bodyPr/>
+      <a:lstStyle/>
+      <a:style>
+        <a:lnRef idx="2">
+          <a:schemeClr val="accent1"/>
+        </a:lnRef>
+        <a:fillRef idx="0">
+          <a:schemeClr val="accent1"/>
+        </a:fillRef>
+        <a:effectRef idx="1">
+          <a:schemeClr val="accent1"/>
+        </a:effectRef>
+        <a:fontRef idx="minor">
+          <a:schemeClr val="tx1"/>
+        </a:fontRef>
+      </a:style>
+    </a:lnDef>
+  </a:objectDefaults>
+  <a:extraClrSchemeLst/>
+</a:theme>
 </file>
--- a/aulas/aula-08-devsecops.pptx
+++ b/aulas/aula-08-devsecops.pptx
@@ -790,7 +790,7 @@
           <a:lstStyle/>
           <a:p>
             <a:r>
-              <a:t>O pipeline do VidaPlus já sobe com os gates. Nesta fase o grupo o consolida como gerador de EVIDÊNCIA (não como a nota — a nota vem do dossiê e da defesa). Documente quais gates ficaram verdes e tornou bloqueantes, gere o SBOM e, como bônus, assine a imagem. Nem todos os gates precisam ficar verdes — só os das PoCs; os demais sustentam o plano de remediação.</a:t>
+              <a:t>O pipeline do VidaPlus já sobe com os gates. Nesta fase o grupo o consolida como gerador de EVIDÊNCIA (não como a nota — a nota vem do dossiê e da defesa). Documente quais gates ficaram verdes e tornou bloqueantes, gere o SBOM e assine a imagem com cosign (proveniência SLSA L2, obrigatória). Nem todos os gates precisam ficar verdes — só os das PoCs; os demais sustentam o plano de remediação.</a:t>
             </a:r>
           </a:p>
         </p:txBody>
@@ -8015,7 +8015,7 @@
                 </a:solidFill>
                 <a:latin typeface="Open Sans"/>
               </a:rPr>
-              <a:t>Bônus: </a:t>
+              <a:t>Obrigatório: </a:t>
             </a:r>
             <a:r>
               <a:rPr sz="1800">
@@ -8024,7 +8024,7 @@
                 </a:solidFill>
                 <a:latin typeface="Open Sans"/>
               </a:rPr>
-              <a:t>assinar a imagem do backend com cosign (SLSA L2).</a:t>
+              <a:t>assinar a imagem do backend com cosign (proveniência SLSA L2).</a:t>
             </a:r>
           </a:p>
           <a:p>

--- a/aulas/aula-08-devsecops.pptx
+++ b/aulas/aula-08-devsecops.pptx
@@ -7807,7 +7807,7 @@
                 </a:solidFill>
                 <a:latin typeface="Open Sans"/>
               </a:rPr>
-              <a:t>Pipeline como evidência</a:t>
+              <a:t>Pipeline como evidência + assinatura (dossiê §8)</a:t>
             </a:r>
           </a:p>
         </p:txBody>
@@ -7904,7 +7904,7 @@
                 </a:solidFill>
                 <a:latin typeface="Open Sans"/>
               </a:rPr>
-              <a:t>Placar de gates: </a:t>
+              <a:t>Entregar: </a:t>
             </a:r>
             <a:r>
               <a:rPr sz="1800">
@@ -7913,7 +7913,7 @@
                 </a:solidFill>
                 <a:latin typeface="Open Sans"/>
               </a:rPr>
-              <a:t>documente a evolução vermelho -&gt; verde do seu pacote.</a:t>
+              <a:t>placar de gates documentado (vermelho -&gt; verde do seu pacote).</a:t>
             </a:r>
           </a:p>
           <a:p>
@@ -8024,7 +8024,7 @@
                 </a:solidFill>
                 <a:latin typeface="Open Sans"/>
               </a:rPr>
-              <a:t>assinar a imagem do backend com cosign (proveniência SLSA L2).</a:t>
+              <a:t>imagem do backend assinada com cosign (proveniência SLSA L2).</a:t>
             </a:r>
           </a:p>
           <a:p>
@@ -8052,7 +8052,7 @@
                 </a:solidFill>
                 <a:latin typeface="Open Sans"/>
               </a:rPr>
-              <a:t>Lembre: </a:t>
+              <a:t>Pronto quando: </a:t>
             </a:r>
             <a:r>
               <a:rPr sz="1800">
@@ -8061,7 +8061,7 @@
                 </a:solidFill>
                 <a:latin typeface="Open Sans"/>
               </a:rPr>
-              <a:t>o pipeline é evidência e feedback — não é a nota.</a:t>
+              <a:t>gates das PoCs verdes + SBOM + assinatura verificada.</a:t>
             </a:r>
           </a:p>
         </p:txBody>

--- a/aulas/aula-08-devsecops.pptx
+++ b/aulas/aula-08-devsecops.pptx
@@ -790,7 +790,7 @@
           <a:lstStyle/>
           <a:p>
             <a:r>
-              <a:t>O pipeline do VidaPlus já sobe com os gates. Nesta fase o grupo o consolida como gerador de EVIDÊNCIA (não como a nota — a nota vem do dossiê e da defesa). Documente quais gates ficaram verdes e tornou bloqueantes, gere o SBOM e assine a imagem com cosign (proveniência SLSA L2, obrigatória). Nem todos os gates precisam ficar verdes — só os das PoCs; os demais sustentam o plano de remediação.</a:t>
+              <a:t>O pipeline do VidaPlus já sobe com os gates. Nesta fase o grupo o consolida como gerador de EVIDÊNCIA (não como a nota — a nota vem do dossiê e da defesa). Documente quais gates ficaram verdes e tornou bloqueantes, gere o SBOM, assine a imagem com cosign E ateste o SBOM da imagem (cosign attest) — proveniência SLSA L2, obrigatória. Nem todos os gates precisam ficar verdes — só os das PoCs; os demais sustentam o plano.</a:t>
             </a:r>
           </a:p>
         </p:txBody>
@@ -8024,7 +8024,7 @@
                 </a:solidFill>
                 <a:latin typeface="Open Sans"/>
               </a:rPr>
-              <a:t>imagem do backend assinada com cosign (proveniência SLSA L2).</a:t>
+              <a:t>assinar a imagem (cosign) + atestar o SBOM da imagem -&gt; SLSA L2.</a:t>
             </a:r>
           </a:p>
           <a:p>
@@ -8061,7 +8061,7 @@
                 </a:solidFill>
                 <a:latin typeface="Open Sans"/>
               </a:rPr>
-              <a:t>gates das PoCs verdes + SBOM + assinatura verificada.</a:t>
+              <a:t>gates das PoCs verdes + assinatura e atestação verificadas.</a:t>
             </a:r>
           </a:p>
         </p:txBody>

--- a/aulas/aula-08-devsecops.pptx
+++ b/aulas/aula-08-devsecops.pptx
@@ -790,7 +790,7 @@
           <a:lstStyle/>
           <a:p>
             <a:r>
-              <a:t>O pipeline do VidaPlus já sobe com os gates. Nesta fase o grupo o consolida como gerador de EVIDÊNCIA (não como a nota — a nota vem do dossiê e da defesa). Documente quais gates ficaram verdes e tornou bloqueantes, gere o SBOM, assine a imagem com cosign E ateste o SBOM da imagem (cosign attest) — proveniência SLSA L2, obrigatória. Nem todos os gates precisam ficar verdes — só os das PoCs; os demais sustentam o plano.</a:t>
+              <a:t>A entrega segura vem PRÉ-FIADA: o aluno não configura ferramenta. Na main, o pipeline faz build once -&gt; publica no GHCR -&gt; assina (cosign keyless) -&gt; atesta o SBOM (SLSA L2) -&gt; sobe staging (smoke/DAST) -&gt; e no deploy-prod VERIFICA a assinatura/atestação (recusa imagem não assinada) e exige APROVAÇÃO manual. O trabalho do grupo é tornar os gates das PoCs bloqueantes e EXPLICAR o fluxo + a evidência (imagem assinada em Packages, verify passando, a pausa de aprovação). Assinar só vale porque alguém verifica.</a:t>
             </a:r>
           </a:p>
         </p:txBody>
@@ -7807,7 +7807,7 @@
                 </a:solidFill>
                 <a:latin typeface="Open Sans"/>
               </a:rPr>
-              <a:t>Pipeline como evidência + assinatura (dossiê §8)</a:t>
+              <a:t>Pipeline como evidência (entrega já pré-fiada) — dossiê §8</a:t>
             </a:r>
           </a:p>
         </p:txBody>
@@ -7904,7 +7904,7 @@
                 </a:solidFill>
                 <a:latin typeface="Open Sans"/>
               </a:rPr>
-              <a:t>Entregar: </a:t>
+              <a:t>Já pronto no pipeline: </a:t>
             </a:r>
             <a:r>
               <a:rPr sz="1800">
@@ -7913,7 +7913,7 @@
                 </a:solidFill>
                 <a:latin typeface="Open Sans"/>
               </a:rPr>
-              <a:t>placar de gates documentado (vermelho -&gt; verde do seu pacote).</a:t>
+              <a:t>release-sign (assina + atesta SBOM) -&gt; staging -&gt; prod.</a:t>
             </a:r>
           </a:p>
           <a:p>
@@ -7941,7 +7941,7 @@
                 </a:solidFill>
                 <a:latin typeface="Open Sans"/>
               </a:rPr>
-              <a:t>SBOM: </a:t>
+              <a:t>Prod só passa: </a:t>
             </a:r>
             <a:r>
               <a:rPr sz="1800">
@@ -7950,7 +7950,7 @@
                 </a:solidFill>
                 <a:latin typeface="Open Sans"/>
               </a:rPr>
-              <a:t>gerado no CI (CycloneDX) e anexado.</a:t>
+              <a:t>com assinatura verificada + aprovação manual (admission gate).</a:t>
             </a:r>
           </a:p>
           <a:p>
@@ -7978,7 +7978,7 @@
                 </a:solidFill>
                 <a:latin typeface="Open Sans"/>
               </a:rPr>
-              <a:t>Sem segredos: </a:t>
+              <a:t>Você NÃO configura: </a:t>
             </a:r>
             <a:r>
               <a:rPr sz="1800">
@@ -7987,7 +7987,7 @@
                 </a:solidFill>
                 <a:latin typeface="Open Sans"/>
               </a:rPr>
-              <a:t>o gate de secret scanning deve ficar verde.</a:t>
+              <a:t>ferramentas usam OIDC + token; sem segredos.</a:t>
             </a:r>
           </a:p>
           <a:p>
@@ -8015,7 +8015,7 @@
                 </a:solidFill>
                 <a:latin typeface="Open Sans"/>
               </a:rPr>
-              <a:t>Obrigatório: </a:t>
+              <a:t>Você faz: </a:t>
             </a:r>
             <a:r>
               <a:rPr sz="1800">
@@ -8024,7 +8024,7 @@
                 </a:solidFill>
                 <a:latin typeface="Open Sans"/>
               </a:rPr>
-              <a:t>assinar a imagem (cosign) + atestar o SBOM da imagem -&gt; SLSA L2.</a:t>
+              <a:t>torna gates bloqueantes + explica o fluxo e a evidência no dossiê.</a:t>
             </a:r>
           </a:p>
           <a:p>
@@ -8052,7 +8052,7 @@
                 </a:solidFill>
                 <a:latin typeface="Open Sans"/>
               </a:rPr>
-              <a:t>Pronto quando: </a:t>
+              <a:t>Setup único: </a:t>
             </a:r>
             <a:r>
               <a:rPr sz="1800">
@@ -8061,7 +8061,7 @@
                 </a:solidFill>
                 <a:latin typeface="Open Sans"/>
               </a:rPr>
-              <a:t>gates das PoCs verdes + assinatura e atestação verificadas.</a:t>
+              <a:t>criar o environment 'production' com revisor (docs/09 §5.3).</a:t>
             </a:r>
           </a:p>
         </p:txBody>

--- a/aulas/aula-08-devsecops.pptx
+++ b/aulas/aula-08-devsecops.pptx
@@ -4083,7 +4083,7 @@
                 </a:solidFill>
                 <a:latin typeface="Open Sans"/>
               </a:rPr>
-              <a:t>TADS · Segurança em Sistemas Computacionais</a:t>
+              <a:t>TADS · Segurança de Sistemas Computacionais</a:t>
             </a:r>
           </a:p>
         </p:txBody>

--- a/aulas/aula-08-devsecops.pptx
+++ b/aulas/aula-08-devsecops.pptx
@@ -8061,7 +8061,7 @@
                 </a:solidFill>
                 <a:latin typeface="Open Sans"/>
               </a:rPr>
-              <a:t>criar o environment 'production' com revisor (docs/09 §5.3).</a:t>
+              <a:t>criar o environment 'production' com revisor (docs/08 §5.3).</a:t>
             </a:r>
           </a:p>
         </p:txBody>

--- a/aulas/aula-08-devsecops.pptx
+++ b/aulas/aula-08-devsecops.pptx
@@ -8024,7 +8024,7 @@
                 </a:solidFill>
                 <a:latin typeface="Open Sans"/>
               </a:rPr>
-              <a:t>torna gates bloqueantes + explica o fluxo e a evidência no dossiê.</a:t>
+              <a:t>lê o pipeline e explica gates, SBOM e assinatura no dossiê.</a:t>
             </a:r>
           </a:p>
           <a:p>
@@ -8052,7 +8052,7 @@
                 </a:solidFill>
                 <a:latin typeface="Open Sans"/>
               </a:rPr>
-              <a:t>Setup único: </a:t>
+              <a:t>Segredos (F-10): </a:t>
             </a:r>
             <a:r>
               <a:rPr sz="1800">
@@ -8061,7 +8061,7 @@
                 </a:solidFill>
                 <a:latin typeface="Open Sans"/>
               </a:rPr>
-              <a:t>criar o environment 'production' com revisor (docs/08 §5.3).</a:t>
+              <a:t>identifique no código e escreva o plano de remediação.</a:t>
             </a:r>
           </a:p>
         </p:txBody>

--- a/aulas/aula-08-devsecops.pptx
+++ b/aulas/aula-08-devsecops.pptx
@@ -8061,7 +8061,7 @@
                 </a:solidFill>
                 <a:latin typeface="Open Sans"/>
               </a:rPr>
-              <a:t>identifique no código e escreva o plano de remediação.</a:t>
+              <a:t>tire do código e troque os valores, em aula guiada (roteiros/comum/08).</a:t>
             </a:r>
           </a:p>
         </p:txBody>
